--- a/Slides/QLS-MiCM_DataProcessingInPython.pptx
+++ b/Slides/QLS-MiCM_DataProcessingInPython.pptx
@@ -5,10 +5,10 @@
     <p:sldMasterId id="2147483660" r:id="rId1"/>
   </p:sldMasterIdLst>
   <p:notesMasterIdLst>
-    <p:notesMasterId r:id="rId25"/>
+    <p:notesMasterId r:id="rId26"/>
   </p:notesMasterIdLst>
   <p:handoutMasterIdLst>
-    <p:handoutMasterId r:id="rId26"/>
+    <p:handoutMasterId r:id="rId27"/>
   </p:handoutMasterIdLst>
   <p:sldIdLst>
     <p:sldId id="316" r:id="rId2"/>
@@ -34,6 +34,7 @@
     <p:sldId id="391" r:id="rId22"/>
     <p:sldId id="388" r:id="rId23"/>
     <p:sldId id="340" r:id="rId24"/>
+    <p:sldId id="396" r:id="rId25"/>
   </p:sldIdLst>
   <p:sldSz cx="9144000" cy="6858000" type="screen4x3"/>
   <p:notesSz cx="6858000" cy="9144000"/>
@@ -237,7 +238,7 @@
           <a:p>
             <a:fld id="{9FF74AA5-8A3E-4FDB-94BB-BF4B31CB4E38}" type="datetimeFigureOut">
               <a:rPr lang="en-CA" smtClean="0"/>
-              <a:t>2025-11-18</a:t>
+              <a:t>2026-03-06</a:t>
             </a:fld>
             <a:endParaRPr lang="en-CA"/>
           </a:p>
@@ -414,7 +415,7 @@
           <a:p>
             <a:fld id="{217E5156-1B5D-054E-B5B2-E1B1BA160252}" type="datetimeFigureOut">
               <a:rPr lang="fr-FR" smtClean="0"/>
-              <a:t>18/11/2025</a:t>
+              <a:t>06/03/2026</a:t>
             </a:fld>
             <a:endParaRPr lang="fr-FR"/>
           </a:p>
@@ -2949,10 +2950,10 @@
       </p:sp>
       <p:sp>
         <p:nvSpPr>
-          <p:cNvPr id="2" name="TextBox 1">
+          <p:cNvPr id="3" name="TextBox 2">
             <a:extLst>
               <a:ext uri="{FF2B5EF4-FFF2-40B4-BE49-F238E27FC236}">
-                <a16:creationId xmlns:a16="http://schemas.microsoft.com/office/drawing/2014/main" id="{E57E6C04-4051-B883-0FFD-0C104B795BCE}"/>
+                <a16:creationId xmlns:a16="http://schemas.microsoft.com/office/drawing/2014/main" id="{69513291-C55D-7CB6-6FB8-00826C7B6F25}"/>
               </a:ext>
             </a:extLst>
           </p:cNvPr>
@@ -2961,8 +2962,8 @@
         </p:nvSpPr>
         <p:spPr>
           <a:xfrm>
-            <a:off x="0" y="6080665"/>
-            <a:ext cx="3567878" cy="646331"/>
+            <a:off x="80296" y="5613781"/>
+            <a:ext cx="3567878" cy="923330"/>
           </a:xfrm>
           <a:prstGeom prst="rect">
             <a:avLst/>
@@ -2979,7 +2980,7 @@
               <a:rPr lang="en-CA" sz="1800" dirty="0">
                 <a:latin typeface="Helvetica Light"/>
               </a:rPr>
-              <a:t>Workshop lead: Benjamin Rudski</a:t>
+              <a:t>Lead: Benjamin Z. Rudski</a:t>
             </a:r>
           </a:p>
           <a:p>
@@ -2987,7 +2988,15 @@
               <a:rPr lang="en-CA" sz="1800" dirty="0">
                 <a:latin typeface="Helvetica Light"/>
               </a:rPr>
-              <a:t>November 18, 2025</a:t>
+              <a:t>Facilitator: James Randolph</a:t>
+            </a:r>
+          </a:p>
+          <a:p>
+            <a:r>
+              <a:rPr lang="en-CA" sz="1800" dirty="0">
+                <a:latin typeface="Helvetica Light"/>
+              </a:rPr>
+              <a:t>March 11, 2026</a:t>
             </a:r>
             <a:endParaRPr lang="en-CA" dirty="0">
               <a:latin typeface="Helvetica Light"/>
@@ -13872,6 +13881,133 @@
 </p:sld>
 </file>
 
+<file path=ppt/slides/slide24.xml><?xml version="1.0" encoding="utf-8"?>
+<p:sld xmlns:a="http://schemas.openxmlformats.org/drawingml/2006/main" xmlns:r="http://schemas.openxmlformats.org/officeDocument/2006/relationships" xmlns:p="http://schemas.openxmlformats.org/presentationml/2006/main">
+  <p:cSld>
+    <p:spTree>
+      <p:nvGrpSpPr>
+        <p:cNvPr id="1" name=""/>
+        <p:cNvGrpSpPr/>
+        <p:nvPr/>
+      </p:nvGrpSpPr>
+      <p:grpSpPr>
+        <a:xfrm>
+          <a:off x="0" y="0"/>
+          <a:ext cx="0" cy="0"/>
+          <a:chOff x="0" y="0"/>
+          <a:chExt cx="0" cy="0"/>
+        </a:xfrm>
+      </p:grpSpPr>
+      <p:sp>
+        <p:nvSpPr>
+          <p:cNvPr id="2" name="Title 1">
+            <a:extLst>
+              <a:ext uri="{FF2B5EF4-FFF2-40B4-BE49-F238E27FC236}">
+                <a16:creationId xmlns:a16="http://schemas.microsoft.com/office/drawing/2014/main" id="{DF4455D8-6138-FF10-C50B-7F061CFCC3F3}"/>
+              </a:ext>
+            </a:extLst>
+          </p:cNvPr>
+          <p:cNvSpPr>
+            <a:spLocks noGrp="1"/>
+          </p:cNvSpPr>
+          <p:nvPr>
+            <p:ph type="title"/>
+          </p:nvPr>
+        </p:nvSpPr>
+        <p:spPr/>
+        <p:txBody>
+          <a:bodyPr/>
+          <a:lstStyle/>
+          <a:p>
+            <a:r>
+              <a:rPr lang="en-CA" dirty="0"/>
+              <a:t>Feedback?</a:t>
+            </a:r>
+          </a:p>
+        </p:txBody>
+      </p:sp>
+      <p:sp>
+        <p:nvSpPr>
+          <p:cNvPr id="3" name="Content Placeholder 2">
+            <a:extLst>
+              <a:ext uri="{FF2B5EF4-FFF2-40B4-BE49-F238E27FC236}">
+                <a16:creationId xmlns:a16="http://schemas.microsoft.com/office/drawing/2014/main" id="{1016925B-3A69-93BC-3629-FB002994945D}"/>
+              </a:ext>
+            </a:extLst>
+          </p:cNvPr>
+          <p:cNvSpPr>
+            <a:spLocks noGrp="1"/>
+          </p:cNvSpPr>
+          <p:nvPr>
+            <p:ph idx="1"/>
+          </p:nvPr>
+        </p:nvSpPr>
+        <p:spPr>
+          <a:xfrm>
+            <a:off x="628650" y="5235577"/>
+            <a:ext cx="7886700" cy="546100"/>
+          </a:xfrm>
+        </p:spPr>
+        <p:txBody>
+          <a:bodyPr/>
+          <a:lstStyle/>
+          <a:p>
+            <a:pPr marL="0" indent="0" algn="ctr">
+              <a:buNone/>
+            </a:pPr>
+            <a:r>
+              <a:rPr lang="en-CA" dirty="0">
+                <a:hlinkClick r:id="rId2" tooltip="Original URL:&#10;https://tinyurl.com/QLS-MiCM-Feedback&#10;&#10;Click to follow link."/>
+              </a:rPr>
+              <a:t>https://tinyurl.com/QLS-MiCM-Feedback</a:t>
+            </a:r>
+            <a:endParaRPr lang="en-CA" dirty="0"/>
+          </a:p>
+        </p:txBody>
+      </p:sp>
+      <p:pic>
+        <p:nvPicPr>
+          <p:cNvPr id="5" name="Picture 4">
+            <a:extLst>
+              <a:ext uri="{FF2B5EF4-FFF2-40B4-BE49-F238E27FC236}">
+                <a16:creationId xmlns:a16="http://schemas.microsoft.com/office/drawing/2014/main" id="{B1A30B14-7A58-66D1-FAFD-BCB5F1F1AD17}"/>
+              </a:ext>
+            </a:extLst>
+          </p:cNvPr>
+          <p:cNvPicPr>
+            <a:picLocks noChangeAspect="1"/>
+          </p:cNvPicPr>
+          <p:nvPr/>
+        </p:nvPicPr>
+        <p:blipFill>
+          <a:blip r:embed="rId3"/>
+          <a:stretch>
+            <a:fillRect/>
+          </a:stretch>
+        </p:blipFill>
+        <p:spPr>
+          <a:xfrm>
+            <a:off x="3136900" y="1993900"/>
+            <a:ext cx="2870200" cy="2870200"/>
+          </a:xfrm>
+          <a:prstGeom prst="rect">
+            <a:avLst/>
+          </a:prstGeom>
+        </p:spPr>
+      </p:pic>
+    </p:spTree>
+    <p:extLst>
+      <p:ext uri="{BB962C8B-B14F-4D97-AF65-F5344CB8AC3E}">
+        <p14:creationId xmlns:p14="http://schemas.microsoft.com/office/powerpoint/2010/main" val="2227553134"/>
+      </p:ext>
+    </p:extLst>
+  </p:cSld>
+  <p:clrMapOvr>
+    <a:masterClrMapping/>
+  </p:clrMapOvr>
+</p:sld>
+</file>
+
 <file path=ppt/slides/slide3.xml><?xml version="1.0" encoding="utf-8"?>
 <p:sld xmlns:a="http://schemas.openxmlformats.org/drawingml/2006/main" xmlns:r="http://schemas.openxmlformats.org/officeDocument/2006/relationships" xmlns:p="http://schemas.openxmlformats.org/presentationml/2006/main">
   <p:cSld>
@@ -13909,7 +14045,7 @@
         </p:nvSpPr>
         <p:spPr>
           <a:xfrm>
-            <a:off x="1647890" y="5256547"/>
+            <a:off x="1647890" y="5514116"/>
             <a:ext cx="5848220" cy="369460"/>
           </a:xfrm>
           <a:prstGeom prst="rect">
@@ -13984,10 +14120,10 @@
       </p:sp>
       <p:pic>
         <p:nvPicPr>
-          <p:cNvPr id="3" name="Picture 2">
+          <p:cNvPr id="2" name="Picture 1">
             <a:extLst>
               <a:ext uri="{FF2B5EF4-FFF2-40B4-BE49-F238E27FC236}">
-                <a16:creationId xmlns:a16="http://schemas.microsoft.com/office/drawing/2014/main" id="{B7DF5B93-5AD7-48E9-BD8D-CD406B453297}"/>
+                <a16:creationId xmlns:a16="http://schemas.microsoft.com/office/drawing/2014/main" id="{6C69662F-A1C2-FE8A-835A-B5EA24525124}"/>
               </a:ext>
             </a:extLst>
           </p:cNvPr>
@@ -13998,69 +14134,19 @@
         </p:nvPicPr>
         <p:blipFill>
           <a:blip r:embed="rId4"/>
-          <a:srcRect b="24034"/>
-          <a:stretch>
-            <a:fillRect/>
-          </a:stretch>
+          <a:srcRect/>
+          <a:stretch/>
         </p:blipFill>
         <p:spPr>
           <a:xfrm>
-            <a:off x="685800" y="2094448"/>
-            <a:ext cx="7772400" cy="3009583"/>
+            <a:off x="932417" y="1941932"/>
+            <a:ext cx="7279166" cy="3572184"/>
           </a:xfrm>
           <a:prstGeom prst="rect">
             <a:avLst/>
           </a:prstGeom>
         </p:spPr>
       </p:pic>
-      <p:sp>
-        <p:nvSpPr>
-          <p:cNvPr id="6" name="TextBox 5">
-            <a:extLst>
-              <a:ext uri="{FF2B5EF4-FFF2-40B4-BE49-F238E27FC236}">
-                <a16:creationId xmlns:a16="http://schemas.microsoft.com/office/drawing/2014/main" id="{082F5C12-37BB-8296-44E4-3A894081D3AD}"/>
-              </a:ext>
-            </a:extLst>
-          </p:cNvPr>
-          <p:cNvSpPr txBox="1"/>
-          <p:nvPr/>
-        </p:nvSpPr>
-        <p:spPr>
-          <a:xfrm>
-            <a:off x="1868520" y="5626007"/>
-            <a:ext cx="5406960" cy="369460"/>
-          </a:xfrm>
-          <a:prstGeom prst="rect">
-            <a:avLst/>
-          </a:prstGeom>
-          <a:noFill/>
-        </p:spPr>
-        <p:txBody>
-          <a:bodyPr wrap="square">
-            <a:spAutoFit/>
-          </a:bodyPr>
-          <a:lstStyle>
-            <a:defPPr>
-              <a:defRPr lang="fr-FR"/>
-            </a:defPPr>
-            <a:lvl1pPr>
-              <a:defRPr>
-                <a:latin typeface="Helvetica" pitchFamily="2" charset="0"/>
-              </a:defRPr>
-            </a:lvl1pPr>
-          </a:lstStyle>
-          <a:p>
-            <a:pPr algn="ctr"/>
-            <a:r>
-              <a:rPr lang="en-CA" dirty="0">
-                <a:hlinkClick r:id="rId5"/>
-              </a:rPr>
-              <a:t>https://involvement.mcgill.ca/organization/micm</a:t>
-            </a:r>
-            <a:endParaRPr lang="en-CA" dirty="0"/>
-          </a:p>
-        </p:txBody>
-      </p:sp>
     </p:spTree>
     <p:extLst>
       <p:ext uri="{BB962C8B-B14F-4D97-AF65-F5344CB8AC3E}">
